--- a/overview/images/qa_resources-v4.pptx
+++ b/overview/images/qa_resources-v4.pptx
@@ -32979,7 +32979,7 @@
           <a:p>
             <a:pPr algn="ctr"/>
             <a:r>
-              <a:rPr lang="en-US" sz="1000" dirty="0" err="1">
+              <a:rPr lang="en-US" sz="1000" dirty="0">
                 <a:solidFill>
                   <a:srgbClr val="FFFFFF"/>
                 </a:solidFill>
@@ -32987,18 +32987,7 @@
                 <a:ea typeface="Source Sans Pro" panose="020B0503030403020204" pitchFamily="34" charset="0"/>
                 <a:cs typeface="Arial" panose="020B0604020202020204" pitchFamily="34" charset="0"/>
               </a:rPr>
-              <a:t>MicroEJ</a:t>
-            </a:r>
-            <a:r>
-              <a:rPr lang="en-US" sz="1000" dirty="0">
-                <a:solidFill>
-                  <a:srgbClr val="FFFFFF"/>
-                </a:solidFill>
-                <a:latin typeface="Source Sans Pro" panose="020B0503030403020204" pitchFamily="34" charset="0"/>
-                <a:ea typeface="Source Sans Pro" panose="020B0503030403020204" pitchFamily="34" charset="0"/>
-                <a:cs typeface="Arial" panose="020B0604020202020204" pitchFamily="34" charset="0"/>
-              </a:rPr>
-              <a:t> Example Applications</a:t>
+              <a:t>Example Applications</a:t>
             </a:r>
           </a:p>
         </p:txBody>
@@ -33689,26 +33678,7 @@
                 <a:latin typeface="Source Sans Pro" panose="020B0503030403020204" pitchFamily="34" charset="0"/>
                 <a:ea typeface="Source Sans Pro" panose="020B0503030403020204" pitchFamily="34" charset="0"/>
               </a:rPr>
-              <a:t>MicroEJ </a:t>
-            </a:r>
-            <a:br>
-              <a:rPr lang="en-US" sz="1000" dirty="0">
-                <a:solidFill>
-                  <a:srgbClr val="FFFFFF"/>
-                </a:solidFill>
-                <a:latin typeface="Source Sans Pro" panose="020B0503030403020204" pitchFamily="34" charset="0"/>
-                <a:ea typeface="Source Sans Pro" panose="020B0503030403020204" pitchFamily="34" charset="0"/>
-              </a:rPr>
-            </a:br>
-            <a:r>
-              <a:rPr lang="en-US" sz="1000" dirty="0">
-                <a:solidFill>
-                  <a:srgbClr val="FFFFFF"/>
-                </a:solidFill>
-                <a:latin typeface="Source Sans Pro" panose="020B0503030403020204" pitchFamily="34" charset="0"/>
-                <a:ea typeface="Source Sans Pro" panose="020B0503030403020204" pitchFamily="34" charset="0"/>
-              </a:rPr>
-              <a:t>Executable</a:t>
+              <a:t> Executable</a:t>
             </a:r>
           </a:p>
         </p:txBody>
@@ -34541,16 +34511,6 @@
               <a:p>
                 <a:pPr algn="ctr"/>
                 <a:r>
-                  <a:rPr lang="en-US" sz="1000" dirty="0" err="1">
-                    <a:solidFill>
-                      <a:srgbClr val="FFFFFF"/>
-                    </a:solidFill>
-                    <a:latin typeface="Source Sans Pro" panose="020B0503030403020204" pitchFamily="34" charset="0"/>
-                    <a:ea typeface="Source Sans Pro" panose="020B0503030403020204" pitchFamily="34" charset="0"/>
-                  </a:rPr>
-                  <a:t>MicroEJ</a:t>
-                </a:r>
-                <a:r>
                   <a:rPr lang="en-US" sz="1000" dirty="0">
                     <a:solidFill>
                       <a:srgbClr val="FFFFFF"/>
@@ -34558,7 +34518,7 @@
                     <a:latin typeface="Source Sans Pro" panose="020B0503030403020204" pitchFamily="34" charset="0"/>
                     <a:ea typeface="Source Sans Pro" panose="020B0503030403020204" pitchFamily="34" charset="0"/>
                   </a:rPr>
-                  <a:t> Architecture</a:t>
+                  <a:t>Architecture</a:t>
                 </a:r>
               </a:p>
             </p:txBody>
@@ -35724,7 +35684,7 @@
                   <a:ea typeface="Source Sans Pro" panose="020B0503030403020204" pitchFamily="34" charset="0"/>
                   <a:cs typeface="Arial" panose="020B0604020202020204" pitchFamily="34" charset="0"/>
                 </a:rPr>
-                <a:t>MICROEJ VEE Architecture </a:t>
+                <a:t>Architecture </a:t>
               </a:r>
             </a:p>
             <a:p>
@@ -36766,7 +36726,7 @@
                   <a:ea typeface="Source Sans Pro" panose="020B0503030403020204" pitchFamily="34" charset="0"/>
                   <a:cs typeface="Source Sans Pro Light" charset="0"/>
                 </a:rPr>
-                <a:t>Major Input or Output</a:t>
+                <a:t>Core Modules</a:t>
               </a:r>
             </a:p>
           </p:txBody>
@@ -40019,7 +39979,7 @@
                     <a:ea typeface="Source Sans Pro" panose="020B0503030403020204" pitchFamily="34" charset="0"/>
                     <a:cs typeface="Source Sans Pro Light" charset="0"/>
                   </a:rPr>
-                  <a:t>MICROEJ VEE Port</a:t>
+                  <a:t>VEE Port</a:t>
                 </a:r>
               </a:p>
             </p:txBody>
@@ -40854,7 +40814,7 @@
                   <a:ea typeface="Source Sans Pro" panose="020B0503030403020204" pitchFamily="34" charset="0"/>
                   <a:cs typeface="Source Sans Pro Light" charset="0"/>
                 </a:rPr>
-                <a:t>Major Input or Output</a:t>
+                <a:t>Core Modules</a:t>
               </a:r>
             </a:p>
           </p:txBody>
@@ -41299,7 +41259,7 @@
                 <a:ea typeface="Source Sans Pro" panose="020B0503030403020204" pitchFamily="34" charset="0"/>
                 <a:cs typeface="Arial" panose="020B0604020202020204" pitchFamily="34" charset="0"/>
               </a:rPr>
-              <a:t>MICROEJ VEE Architecture </a:t>
+              <a:t>Architecture </a:t>
             </a:r>
           </a:p>
           <a:p>
@@ -43668,7 +43628,7 @@
         <p:spPr>
           <a:xfrm>
             <a:off x="4454145" y="2954432"/>
-            <a:ext cx="1702710" cy="246221"/>
+            <a:ext cx="2108269" cy="246221"/>
           </a:xfrm>
           <a:prstGeom prst="rect">
             <a:avLst/>
@@ -43796,7 +43756,7 @@
                 <a:latin typeface="Source Sans Pro" panose="020B0503030403020204" pitchFamily="34" charset="0"/>
                 <a:ea typeface="Source Sans Pro" panose="020B0503030403020204" pitchFamily="34" charset="0"/>
               </a:rPr>
-              <a:t>runtime.a</a:t>
+              <a:t>microejruntime.a</a:t>
             </a:r>
             <a:r>
               <a:rPr lang="en-US" sz="1000" dirty="0">
@@ -44751,7 +44711,7 @@
                     <a:ea typeface="Source Sans Pro" panose="020B0503030403020204" pitchFamily="34" charset="0"/>
                     <a:cs typeface="Arial" panose="020B0604020202020204" pitchFamily="34" charset="0"/>
                   </a:rPr>
-                  <a:t>MICROEJ VEE Port</a:t>
+                  <a:t>VEE Port</a:t>
                 </a:r>
                 <a:endParaRPr lang="en-US" sz="1000" dirty="0">
                   <a:solidFill>
@@ -47279,7 +47239,7 @@
                   <a:ea typeface="Source Sans Pro" panose="020B0503030403020204" pitchFamily="34" charset="0"/>
                   <a:cs typeface="Source Sans Pro Light" charset="0"/>
                 </a:rPr>
-                <a:t>Major Input or Output</a:t>
+                <a:t>Core Modules</a:t>
               </a:r>
             </a:p>
           </p:txBody>
@@ -49174,7 +49134,7 @@
                   <a:ea typeface="Source Sans Pro" panose="020B0503030403020204" pitchFamily="34" charset="0"/>
                   <a:cs typeface="Arial" panose="020B0604020202020204" pitchFamily="34" charset="0"/>
                 </a:rPr>
-                <a:t>MICROEJ VEE Port</a:t>
+                <a:t>VEE Port</a:t>
               </a:r>
               <a:endParaRPr lang="en-US" sz="1000" dirty="0">
                 <a:solidFill>
@@ -52362,7 +52322,7 @@
                   <a:ea typeface="Source Sans Pro" panose="020B0503030403020204" pitchFamily="34" charset="0"/>
                   <a:cs typeface="Source Sans Pro Light" charset="0"/>
                 </a:rPr>
-                <a:t>Major Input or Output</a:t>
+                <a:t>Core Modules</a:t>
               </a:r>
             </a:p>
           </p:txBody>
